--- a/presentations/kiro-presentation.pptx
+++ b/presentations/kiro-presentation.pptx
@@ -7567,7 +7567,7 @@
         <p:spPr>
           <a:xfrm>
             <a:off x="502920" y="2295144"/>
-            <a:ext cx="11183112" cy="795528"/>
+            <a:ext cx="11183112" cy="969264"/>
           </a:xfrm>
           <a:prstGeom prst="roundRect">
             <a:avLst>
@@ -7611,28 +7611,28 @@
         </p:nvSpPr>
         <p:spPr>
           <a:xfrm>
-            <a:off x="704088" y="2450592"/>
-            <a:ext cx="10789920" cy="475488"/>
-          </a:xfrm>
-          <a:prstGeom prst="rect">
-            <a:avLst/>
-          </a:prstGeom>
-          <a:noFill/>
-        </p:spPr>
-        <p:txBody>
-          <a:bodyPr wrap="square" lIns="0" rIns="0" tIns="0" bIns="0" anchor="t">
-            <a:spAutoFit/>
-          </a:bodyPr>
-          <a:lstStyle/>
-          <a:p>
-            <a:pPr>
-              <a:lnSpc>
-                <a:spcPct val="112000"/>
-              </a:lnSpc>
-              <a:spcAft>
-                <a:spcPts val="300"/>
-              </a:spcAft>
-              <a:defRPr sz="1400" b="0">
+            <a:off x="704088" y="2432304"/>
+            <a:ext cx="10789920" cy="713232"/>
+          </a:xfrm>
+          <a:prstGeom prst="rect">
+            <a:avLst/>
+          </a:prstGeom>
+          <a:noFill/>
+        </p:spPr>
+        <p:txBody>
+          <a:bodyPr wrap="square" lIns="0" rIns="0" tIns="0" bIns="0" anchor="t">
+            <a:spAutoFit/>
+          </a:bodyPr>
+          <a:lstStyle/>
+          <a:p>
+            <a:pPr>
+              <a:lnSpc>
+                <a:spcPct val="112000"/>
+              </a:lnSpc>
+              <a:spcAft>
+                <a:spcPts val="300"/>
+              </a:spcAft>
+              <a:defRPr sz="1500" b="0">
                 <a:solidFill>
                   <a:srgbClr val="FFFFFF"/>
                 </a:solidFill>
@@ -7653,7 +7653,7 @@
         </p:nvSpPr>
         <p:spPr>
           <a:xfrm>
-            <a:off x="502920" y="3264408"/>
+            <a:off x="502920" y="3429000"/>
             <a:ext cx="3200400" cy="201168"/>
           </a:xfrm>
           <a:prstGeom prst="rect">
@@ -7695,7 +7695,7 @@
         </p:nvSpPr>
         <p:spPr>
           <a:xfrm>
-            <a:off x="502920" y="3520439"/>
+            <a:off x="502920" y="3685032"/>
             <a:ext cx="3337560" cy="612648"/>
           </a:xfrm>
           <a:prstGeom prst="rect">
@@ -7737,7 +7737,7 @@
         </p:nvSpPr>
         <p:spPr>
           <a:xfrm>
-            <a:off x="502920" y="4224528"/>
+            <a:off x="502920" y="4389120"/>
             <a:ext cx="3200400" cy="201168"/>
           </a:xfrm>
           <a:prstGeom prst="rect">
@@ -7779,7 +7779,7 @@
         </p:nvSpPr>
         <p:spPr>
           <a:xfrm>
-            <a:off x="502920" y="4480560"/>
+            <a:off x="502920" y="4645152"/>
             <a:ext cx="3337560" cy="612648"/>
           </a:xfrm>
           <a:prstGeom prst="rect">
@@ -7821,7 +7821,7 @@
         </p:nvSpPr>
         <p:spPr>
           <a:xfrm>
-            <a:off x="502920" y="5184648"/>
+            <a:off x="502920" y="5349240"/>
             <a:ext cx="3200400" cy="201168"/>
           </a:xfrm>
           <a:prstGeom prst="rect">
@@ -7863,7 +7863,7 @@
         </p:nvSpPr>
         <p:spPr>
           <a:xfrm>
-            <a:off x="502920" y="5440680"/>
+            <a:off x="502920" y="5605272"/>
             <a:ext cx="3337560" cy="612648"/>
           </a:xfrm>
           <a:prstGeom prst="rect">
@@ -7905,8 +7905,8 @@
         </p:nvSpPr>
         <p:spPr>
           <a:xfrm>
-            <a:off x="4096512" y="3246120"/>
-            <a:ext cx="7589520" cy="534009"/>
+            <a:off x="4096512" y="3410712"/>
+            <a:ext cx="7589520" cy="501091"/>
           </a:xfrm>
           <a:prstGeom prst="roundRect">
             <a:avLst>
@@ -7950,7 +7950,7 @@
         </p:nvSpPr>
         <p:spPr>
           <a:xfrm>
-            <a:off x="4233672" y="3355848"/>
+            <a:off x="4233672" y="3520440"/>
             <a:ext cx="594360" cy="256032"/>
           </a:xfrm>
           <a:prstGeom prst="rect">
@@ -7992,7 +7992,7 @@
         </p:nvSpPr>
         <p:spPr>
           <a:xfrm>
-            <a:off x="4937760" y="3319272"/>
+            <a:off x="4937760" y="3483864"/>
             <a:ext cx="6537960" cy="219456"/>
           </a:xfrm>
           <a:prstGeom prst="rect">
@@ -8034,28 +8034,28 @@
         </p:nvSpPr>
         <p:spPr>
           <a:xfrm>
-            <a:off x="4937760" y="3557015"/>
-            <a:ext cx="6537960" cy="232257"/>
-          </a:xfrm>
-          <a:prstGeom prst="rect">
-            <a:avLst/>
-          </a:prstGeom>
-          <a:noFill/>
-        </p:spPr>
-        <p:txBody>
-          <a:bodyPr wrap="square" lIns="0" rIns="0" tIns="0" bIns="0" anchor="t">
-            <a:spAutoFit/>
-          </a:bodyPr>
-          <a:lstStyle/>
-          <a:p>
-            <a:pPr>
-              <a:lnSpc>
-                <a:spcPct val="112000"/>
-              </a:lnSpc>
-              <a:spcAft>
-                <a:spcPts val="300"/>
-              </a:spcAft>
-              <a:defRPr sz="1400" b="0">
+            <a:off x="4937760" y="3685032"/>
+            <a:ext cx="6537960" cy="263347"/>
+          </a:xfrm>
+          <a:prstGeom prst="rect">
+            <a:avLst/>
+          </a:prstGeom>
+          <a:noFill/>
+        </p:spPr>
+        <p:txBody>
+          <a:bodyPr wrap="square" lIns="0" rIns="0" tIns="0" bIns="0" anchor="t">
+            <a:spAutoFit/>
+          </a:bodyPr>
+          <a:lstStyle/>
+          <a:p>
+            <a:pPr>
+              <a:lnSpc>
+                <a:spcPct val="112000"/>
+              </a:lnSpc>
+              <a:spcAft>
+                <a:spcPts val="300"/>
+              </a:spcAft>
+              <a:defRPr sz="1350" b="0">
                 <a:solidFill>
                   <a:srgbClr val="182B43"/>
                 </a:solidFill>
@@ -8076,8 +8076,8 @@
         </p:nvSpPr>
         <p:spPr>
           <a:xfrm>
-            <a:off x="4096512" y="3834993"/>
-            <a:ext cx="7589520" cy="534009"/>
+            <a:off x="4096512" y="3966667"/>
+            <a:ext cx="7589520" cy="501091"/>
           </a:xfrm>
           <a:prstGeom prst="roundRect">
             <a:avLst>
@@ -8121,7 +8121,7 @@
         </p:nvSpPr>
         <p:spPr>
           <a:xfrm>
-            <a:off x="4233672" y="3944721"/>
+            <a:off x="4233672" y="4076395"/>
             <a:ext cx="594360" cy="256032"/>
           </a:xfrm>
           <a:prstGeom prst="rect">
@@ -8163,7 +8163,7 @@
         </p:nvSpPr>
         <p:spPr>
           <a:xfrm>
-            <a:off x="4937760" y="3908145"/>
+            <a:off x="4937760" y="4039819"/>
             <a:ext cx="6537960" cy="219456"/>
           </a:xfrm>
           <a:prstGeom prst="rect">
@@ -8205,28 +8205,28 @@
         </p:nvSpPr>
         <p:spPr>
           <a:xfrm>
-            <a:off x="4937760" y="4145889"/>
-            <a:ext cx="6537960" cy="232257"/>
-          </a:xfrm>
-          <a:prstGeom prst="rect">
-            <a:avLst/>
-          </a:prstGeom>
-          <a:noFill/>
-        </p:spPr>
-        <p:txBody>
-          <a:bodyPr wrap="square" lIns="0" rIns="0" tIns="0" bIns="0" anchor="t">
-            <a:spAutoFit/>
-          </a:bodyPr>
-          <a:lstStyle/>
-          <a:p>
-            <a:pPr>
-              <a:lnSpc>
-                <a:spcPct val="112000"/>
-              </a:lnSpc>
-              <a:spcAft>
-                <a:spcPts val="300"/>
-              </a:spcAft>
-              <a:defRPr sz="1400" b="0">
+            <a:off x="4937760" y="4240987"/>
+            <a:ext cx="6537960" cy="263347"/>
+          </a:xfrm>
+          <a:prstGeom prst="rect">
+            <a:avLst/>
+          </a:prstGeom>
+          <a:noFill/>
+        </p:spPr>
+        <p:txBody>
+          <a:bodyPr wrap="square" lIns="0" rIns="0" tIns="0" bIns="0" anchor="t">
+            <a:spAutoFit/>
+          </a:bodyPr>
+          <a:lstStyle/>
+          <a:p>
+            <a:pPr>
+              <a:lnSpc>
+                <a:spcPct val="112000"/>
+              </a:lnSpc>
+              <a:spcAft>
+                <a:spcPts val="300"/>
+              </a:spcAft>
+              <a:defRPr sz="1350" b="0">
                 <a:solidFill>
                   <a:srgbClr val="182B43"/>
                 </a:solidFill>
@@ -8247,8 +8247,8 @@
         </p:nvSpPr>
         <p:spPr>
           <a:xfrm>
-            <a:off x="4096512" y="4423867"/>
-            <a:ext cx="7589520" cy="534009"/>
+            <a:off x="4096512" y="4522622"/>
+            <a:ext cx="7589520" cy="501091"/>
           </a:xfrm>
           <a:prstGeom prst="roundRect">
             <a:avLst>
@@ -8292,7 +8292,7 @@
         </p:nvSpPr>
         <p:spPr>
           <a:xfrm>
-            <a:off x="4233672" y="4533595"/>
+            <a:off x="4233672" y="4632350"/>
             <a:ext cx="594360" cy="256032"/>
           </a:xfrm>
           <a:prstGeom prst="rect">
@@ -8334,7 +8334,7 @@
         </p:nvSpPr>
         <p:spPr>
           <a:xfrm>
-            <a:off x="4937760" y="4497019"/>
+            <a:off x="4937760" y="4595774"/>
             <a:ext cx="6537960" cy="219456"/>
           </a:xfrm>
           <a:prstGeom prst="rect">
@@ -8376,28 +8376,28 @@
         </p:nvSpPr>
         <p:spPr>
           <a:xfrm>
-            <a:off x="4937760" y="4734763"/>
-            <a:ext cx="6537960" cy="232257"/>
-          </a:xfrm>
-          <a:prstGeom prst="rect">
-            <a:avLst/>
-          </a:prstGeom>
-          <a:noFill/>
-        </p:spPr>
-        <p:txBody>
-          <a:bodyPr wrap="square" lIns="0" rIns="0" tIns="0" bIns="0" anchor="t">
-            <a:spAutoFit/>
-          </a:bodyPr>
-          <a:lstStyle/>
-          <a:p>
-            <a:pPr>
-              <a:lnSpc>
-                <a:spcPct val="112000"/>
-              </a:lnSpc>
-              <a:spcAft>
-                <a:spcPts val="300"/>
-              </a:spcAft>
-              <a:defRPr sz="1400" b="0">
+            <a:off x="4937760" y="4796942"/>
+            <a:ext cx="6537960" cy="263347"/>
+          </a:xfrm>
+          <a:prstGeom prst="rect">
+            <a:avLst/>
+          </a:prstGeom>
+          <a:noFill/>
+        </p:spPr>
+        <p:txBody>
+          <a:bodyPr wrap="square" lIns="0" rIns="0" tIns="0" bIns="0" anchor="t">
+            <a:spAutoFit/>
+          </a:bodyPr>
+          <a:lstStyle/>
+          <a:p>
+            <a:pPr>
+              <a:lnSpc>
+                <a:spcPct val="112000"/>
+              </a:lnSpc>
+              <a:spcAft>
+                <a:spcPts val="300"/>
+              </a:spcAft>
+              <a:defRPr sz="1350" b="0">
                 <a:solidFill>
                   <a:srgbClr val="182B43"/>
                 </a:solidFill>
@@ -8418,8 +8418,8 @@
         </p:nvSpPr>
         <p:spPr>
           <a:xfrm>
-            <a:off x="4096512" y="5012740"/>
-            <a:ext cx="7589520" cy="534009"/>
+            <a:off x="4096512" y="5078577"/>
+            <a:ext cx="7589520" cy="501091"/>
           </a:xfrm>
           <a:prstGeom prst="roundRect">
             <a:avLst>
@@ -8463,7 +8463,7 @@
         </p:nvSpPr>
         <p:spPr>
           <a:xfrm>
-            <a:off x="4233672" y="5122468"/>
+            <a:off x="4233672" y="5188305"/>
             <a:ext cx="594360" cy="256032"/>
           </a:xfrm>
           <a:prstGeom prst="rect">
@@ -8505,7 +8505,7 @@
         </p:nvSpPr>
         <p:spPr>
           <a:xfrm>
-            <a:off x="4937760" y="5085892"/>
+            <a:off x="4937760" y="5151729"/>
             <a:ext cx="6537960" cy="219456"/>
           </a:xfrm>
           <a:prstGeom prst="rect">
@@ -8547,28 +8547,28 @@
         </p:nvSpPr>
         <p:spPr>
           <a:xfrm>
-            <a:off x="4937760" y="5323636"/>
-            <a:ext cx="6537960" cy="232257"/>
-          </a:xfrm>
-          <a:prstGeom prst="rect">
-            <a:avLst/>
-          </a:prstGeom>
-          <a:noFill/>
-        </p:spPr>
-        <p:txBody>
-          <a:bodyPr wrap="square" lIns="0" rIns="0" tIns="0" bIns="0" anchor="t">
-            <a:spAutoFit/>
-          </a:bodyPr>
-          <a:lstStyle/>
-          <a:p>
-            <a:pPr>
-              <a:lnSpc>
-                <a:spcPct val="112000"/>
-              </a:lnSpc>
-              <a:spcAft>
-                <a:spcPts val="300"/>
-              </a:spcAft>
-              <a:defRPr sz="1400" b="0">
+            <a:off x="4937760" y="5352897"/>
+            <a:ext cx="6537960" cy="263347"/>
+          </a:xfrm>
+          <a:prstGeom prst="rect">
+            <a:avLst/>
+          </a:prstGeom>
+          <a:noFill/>
+        </p:spPr>
+        <p:txBody>
+          <a:bodyPr wrap="square" lIns="0" rIns="0" tIns="0" bIns="0" anchor="t">
+            <a:spAutoFit/>
+          </a:bodyPr>
+          <a:lstStyle/>
+          <a:p>
+            <a:pPr>
+              <a:lnSpc>
+                <a:spcPct val="112000"/>
+              </a:lnSpc>
+              <a:spcAft>
+                <a:spcPts val="300"/>
+              </a:spcAft>
+              <a:defRPr sz="1350" b="0">
                 <a:solidFill>
                   <a:srgbClr val="182B43"/>
                 </a:solidFill>
@@ -8589,8 +8589,8 @@
         </p:nvSpPr>
         <p:spPr>
           <a:xfrm>
-            <a:off x="4096512" y="5601614"/>
-            <a:ext cx="7589520" cy="534009"/>
+            <a:off x="4096512" y="5634532"/>
+            <a:ext cx="7589520" cy="501091"/>
           </a:xfrm>
           <a:prstGeom prst="roundRect">
             <a:avLst>
@@ -8634,7 +8634,7 @@
         </p:nvSpPr>
         <p:spPr>
           <a:xfrm>
-            <a:off x="4233672" y="5711342"/>
+            <a:off x="4233672" y="5744260"/>
             <a:ext cx="594360" cy="256032"/>
           </a:xfrm>
           <a:prstGeom prst="rect">
@@ -8676,7 +8676,7 @@
         </p:nvSpPr>
         <p:spPr>
           <a:xfrm>
-            <a:off x="4937760" y="5674766"/>
+            <a:off x="4937760" y="5707684"/>
             <a:ext cx="6537960" cy="219456"/>
           </a:xfrm>
           <a:prstGeom prst="rect">
@@ -8718,28 +8718,28 @@
         </p:nvSpPr>
         <p:spPr>
           <a:xfrm>
-            <a:off x="4937760" y="5912510"/>
-            <a:ext cx="6537960" cy="232257"/>
-          </a:xfrm>
-          <a:prstGeom prst="rect">
-            <a:avLst/>
-          </a:prstGeom>
-          <a:noFill/>
-        </p:spPr>
-        <p:txBody>
-          <a:bodyPr wrap="square" lIns="0" rIns="0" tIns="0" bIns="0" anchor="t">
-            <a:spAutoFit/>
-          </a:bodyPr>
-          <a:lstStyle/>
-          <a:p>
-            <a:pPr>
-              <a:lnSpc>
-                <a:spcPct val="112000"/>
-              </a:lnSpc>
-              <a:spcAft>
-                <a:spcPts val="300"/>
-              </a:spcAft>
-              <a:defRPr sz="1400" b="0">
+            <a:off x="4937760" y="5908852"/>
+            <a:ext cx="6537960" cy="263347"/>
+          </a:xfrm>
+          <a:prstGeom prst="rect">
+            <a:avLst/>
+          </a:prstGeom>
+          <a:noFill/>
+        </p:spPr>
+        <p:txBody>
+          <a:bodyPr wrap="square" lIns="0" rIns="0" tIns="0" bIns="0" anchor="t">
+            <a:spAutoFit/>
+          </a:bodyPr>
+          <a:lstStyle/>
+          <a:p>
+            <a:pPr>
+              <a:lnSpc>
+                <a:spcPct val="112000"/>
+              </a:lnSpc>
+              <a:spcAft>
+                <a:spcPts val="300"/>
+              </a:spcAft>
+              <a:defRPr sz="1350" b="0">
                 <a:solidFill>
                   <a:srgbClr val="182B43"/>
                 </a:solidFill>
@@ -20548,7 +20548,7 @@
         <p:spPr>
           <a:xfrm>
             <a:off x="502920" y="2295144"/>
-            <a:ext cx="11183112" cy="795528"/>
+            <a:ext cx="11183112" cy="969264"/>
           </a:xfrm>
           <a:prstGeom prst="roundRect">
             <a:avLst>
@@ -20592,28 +20592,28 @@
         </p:nvSpPr>
         <p:spPr>
           <a:xfrm>
-            <a:off x="704088" y="2450592"/>
-            <a:ext cx="10789920" cy="475488"/>
-          </a:xfrm>
-          <a:prstGeom prst="rect">
-            <a:avLst/>
-          </a:prstGeom>
-          <a:noFill/>
-        </p:spPr>
-        <p:txBody>
-          <a:bodyPr wrap="square" lIns="0" rIns="0" tIns="0" bIns="0" anchor="t">
-            <a:spAutoFit/>
-          </a:bodyPr>
-          <a:lstStyle/>
-          <a:p>
-            <a:pPr>
-              <a:lnSpc>
-                <a:spcPct val="112000"/>
-              </a:lnSpc>
-              <a:spcAft>
-                <a:spcPts val="300"/>
-              </a:spcAft>
-              <a:defRPr sz="1400" b="0">
+            <a:off x="704088" y="2432304"/>
+            <a:ext cx="10789920" cy="713232"/>
+          </a:xfrm>
+          <a:prstGeom prst="rect">
+            <a:avLst/>
+          </a:prstGeom>
+          <a:noFill/>
+        </p:spPr>
+        <p:txBody>
+          <a:bodyPr wrap="square" lIns="0" rIns="0" tIns="0" bIns="0" anchor="t">
+            <a:spAutoFit/>
+          </a:bodyPr>
+          <a:lstStyle/>
+          <a:p>
+            <a:pPr>
+              <a:lnSpc>
+                <a:spcPct val="112000"/>
+              </a:lnSpc>
+              <a:spcAft>
+                <a:spcPts val="300"/>
+              </a:spcAft>
+              <a:defRPr sz="1500" b="0">
                 <a:solidFill>
                   <a:srgbClr val="FFFFFF"/>
                 </a:solidFill>
@@ -20634,7 +20634,7 @@
         </p:nvSpPr>
         <p:spPr>
           <a:xfrm>
-            <a:off x="502920" y="3264408"/>
+            <a:off x="502920" y="3429000"/>
             <a:ext cx="3200400" cy="201168"/>
           </a:xfrm>
           <a:prstGeom prst="rect">
@@ -20676,7 +20676,7 @@
         </p:nvSpPr>
         <p:spPr>
           <a:xfrm>
-            <a:off x="502920" y="3520439"/>
+            <a:off x="502920" y="3685032"/>
             <a:ext cx="3337560" cy="612648"/>
           </a:xfrm>
           <a:prstGeom prst="rect">
@@ -20718,7 +20718,7 @@
         </p:nvSpPr>
         <p:spPr>
           <a:xfrm>
-            <a:off x="502920" y="4224528"/>
+            <a:off x="502920" y="4389120"/>
             <a:ext cx="3200400" cy="201168"/>
           </a:xfrm>
           <a:prstGeom prst="rect">
@@ -20760,7 +20760,7 @@
         </p:nvSpPr>
         <p:spPr>
           <a:xfrm>
-            <a:off x="502920" y="4480560"/>
+            <a:off x="502920" y="4645152"/>
             <a:ext cx="3337560" cy="612648"/>
           </a:xfrm>
           <a:prstGeom prst="rect">
@@ -20802,7 +20802,7 @@
         </p:nvSpPr>
         <p:spPr>
           <a:xfrm>
-            <a:off x="502920" y="5184648"/>
+            <a:off x="502920" y="5349240"/>
             <a:ext cx="3200400" cy="201168"/>
           </a:xfrm>
           <a:prstGeom prst="rect">
@@ -20844,7 +20844,7 @@
         </p:nvSpPr>
         <p:spPr>
           <a:xfrm>
-            <a:off x="502920" y="5440680"/>
+            <a:off x="502920" y="5605272"/>
             <a:ext cx="3337560" cy="612648"/>
           </a:xfrm>
           <a:prstGeom prst="rect">
@@ -20886,8 +20886,8 @@
         </p:nvSpPr>
         <p:spPr>
           <a:xfrm>
-            <a:off x="4096512" y="3246120"/>
-            <a:ext cx="7589520" cy="534009"/>
+            <a:off x="4096512" y="3410712"/>
+            <a:ext cx="7589520" cy="501091"/>
           </a:xfrm>
           <a:prstGeom prst="roundRect">
             <a:avLst>
@@ -20931,7 +20931,7 @@
         </p:nvSpPr>
         <p:spPr>
           <a:xfrm>
-            <a:off x="4233672" y="3355848"/>
+            <a:off x="4233672" y="3520440"/>
             <a:ext cx="594360" cy="256032"/>
           </a:xfrm>
           <a:prstGeom prst="rect">
@@ -20973,7 +20973,7 @@
         </p:nvSpPr>
         <p:spPr>
           <a:xfrm>
-            <a:off x="4937760" y="3319272"/>
+            <a:off x="4937760" y="3483864"/>
             <a:ext cx="6537960" cy="219456"/>
           </a:xfrm>
           <a:prstGeom prst="rect">
@@ -21015,28 +21015,28 @@
         </p:nvSpPr>
         <p:spPr>
           <a:xfrm>
-            <a:off x="4937760" y="3557015"/>
-            <a:ext cx="6537960" cy="232257"/>
-          </a:xfrm>
-          <a:prstGeom prst="rect">
-            <a:avLst/>
-          </a:prstGeom>
-          <a:noFill/>
-        </p:spPr>
-        <p:txBody>
-          <a:bodyPr wrap="square" lIns="0" rIns="0" tIns="0" bIns="0" anchor="t">
-            <a:spAutoFit/>
-          </a:bodyPr>
-          <a:lstStyle/>
-          <a:p>
-            <a:pPr>
-              <a:lnSpc>
-                <a:spcPct val="112000"/>
-              </a:lnSpc>
-              <a:spcAft>
-                <a:spcPts val="300"/>
-              </a:spcAft>
-              <a:defRPr sz="1400" b="0">
+            <a:off x="4937760" y="3685032"/>
+            <a:ext cx="6537960" cy="263347"/>
+          </a:xfrm>
+          <a:prstGeom prst="rect">
+            <a:avLst/>
+          </a:prstGeom>
+          <a:noFill/>
+        </p:spPr>
+        <p:txBody>
+          <a:bodyPr wrap="square" lIns="0" rIns="0" tIns="0" bIns="0" anchor="t">
+            <a:spAutoFit/>
+          </a:bodyPr>
+          <a:lstStyle/>
+          <a:p>
+            <a:pPr>
+              <a:lnSpc>
+                <a:spcPct val="112000"/>
+              </a:lnSpc>
+              <a:spcAft>
+                <a:spcPts val="300"/>
+              </a:spcAft>
+              <a:defRPr sz="1350" b="0">
                 <a:solidFill>
                   <a:srgbClr val="182B43"/>
                 </a:solidFill>
@@ -21057,8 +21057,8 @@
         </p:nvSpPr>
         <p:spPr>
           <a:xfrm>
-            <a:off x="4096512" y="3834993"/>
-            <a:ext cx="7589520" cy="534009"/>
+            <a:off x="4096512" y="3966667"/>
+            <a:ext cx="7589520" cy="501091"/>
           </a:xfrm>
           <a:prstGeom prst="roundRect">
             <a:avLst>
@@ -21102,7 +21102,7 @@
         </p:nvSpPr>
         <p:spPr>
           <a:xfrm>
-            <a:off x="4233672" y="3944721"/>
+            <a:off x="4233672" y="4076395"/>
             <a:ext cx="594360" cy="256032"/>
           </a:xfrm>
           <a:prstGeom prst="rect">
@@ -21144,7 +21144,7 @@
         </p:nvSpPr>
         <p:spPr>
           <a:xfrm>
-            <a:off x="4937760" y="3908145"/>
+            <a:off x="4937760" y="4039819"/>
             <a:ext cx="6537960" cy="219456"/>
           </a:xfrm>
           <a:prstGeom prst="rect">
@@ -21186,28 +21186,28 @@
         </p:nvSpPr>
         <p:spPr>
           <a:xfrm>
-            <a:off x="4937760" y="4145889"/>
-            <a:ext cx="6537960" cy="232257"/>
-          </a:xfrm>
-          <a:prstGeom prst="rect">
-            <a:avLst/>
-          </a:prstGeom>
-          <a:noFill/>
-        </p:spPr>
-        <p:txBody>
-          <a:bodyPr wrap="square" lIns="0" rIns="0" tIns="0" bIns="0" anchor="t">
-            <a:spAutoFit/>
-          </a:bodyPr>
-          <a:lstStyle/>
-          <a:p>
-            <a:pPr>
-              <a:lnSpc>
-                <a:spcPct val="112000"/>
-              </a:lnSpc>
-              <a:spcAft>
-                <a:spcPts val="300"/>
-              </a:spcAft>
-              <a:defRPr sz="1400" b="0">
+            <a:off x="4937760" y="4240987"/>
+            <a:ext cx="6537960" cy="263347"/>
+          </a:xfrm>
+          <a:prstGeom prst="rect">
+            <a:avLst/>
+          </a:prstGeom>
+          <a:noFill/>
+        </p:spPr>
+        <p:txBody>
+          <a:bodyPr wrap="square" lIns="0" rIns="0" tIns="0" bIns="0" anchor="t">
+            <a:spAutoFit/>
+          </a:bodyPr>
+          <a:lstStyle/>
+          <a:p>
+            <a:pPr>
+              <a:lnSpc>
+                <a:spcPct val="112000"/>
+              </a:lnSpc>
+              <a:spcAft>
+                <a:spcPts val="300"/>
+              </a:spcAft>
+              <a:defRPr sz="1350" b="0">
                 <a:solidFill>
                   <a:srgbClr val="182B43"/>
                 </a:solidFill>
@@ -21228,8 +21228,8 @@
         </p:nvSpPr>
         <p:spPr>
           <a:xfrm>
-            <a:off x="4096512" y="4423867"/>
-            <a:ext cx="7589520" cy="534009"/>
+            <a:off x="4096512" y="4522622"/>
+            <a:ext cx="7589520" cy="501091"/>
           </a:xfrm>
           <a:prstGeom prst="roundRect">
             <a:avLst>
@@ -21273,7 +21273,7 @@
         </p:nvSpPr>
         <p:spPr>
           <a:xfrm>
-            <a:off x="4233672" y="4533595"/>
+            <a:off x="4233672" y="4632350"/>
             <a:ext cx="594360" cy="256032"/>
           </a:xfrm>
           <a:prstGeom prst="rect">
@@ -21315,7 +21315,7 @@
         </p:nvSpPr>
         <p:spPr>
           <a:xfrm>
-            <a:off x="4937760" y="4497019"/>
+            <a:off x="4937760" y="4595774"/>
             <a:ext cx="6537960" cy="219456"/>
           </a:xfrm>
           <a:prstGeom prst="rect">
@@ -21357,28 +21357,28 @@
         </p:nvSpPr>
         <p:spPr>
           <a:xfrm>
-            <a:off x="4937760" y="4734763"/>
-            <a:ext cx="6537960" cy="232257"/>
-          </a:xfrm>
-          <a:prstGeom prst="rect">
-            <a:avLst/>
-          </a:prstGeom>
-          <a:noFill/>
-        </p:spPr>
-        <p:txBody>
-          <a:bodyPr wrap="square" lIns="0" rIns="0" tIns="0" bIns="0" anchor="t">
-            <a:spAutoFit/>
-          </a:bodyPr>
-          <a:lstStyle/>
-          <a:p>
-            <a:pPr>
-              <a:lnSpc>
-                <a:spcPct val="112000"/>
-              </a:lnSpc>
-              <a:spcAft>
-                <a:spcPts val="300"/>
-              </a:spcAft>
-              <a:defRPr sz="1400" b="0">
+            <a:off x="4937760" y="4796942"/>
+            <a:ext cx="6537960" cy="263347"/>
+          </a:xfrm>
+          <a:prstGeom prst="rect">
+            <a:avLst/>
+          </a:prstGeom>
+          <a:noFill/>
+        </p:spPr>
+        <p:txBody>
+          <a:bodyPr wrap="square" lIns="0" rIns="0" tIns="0" bIns="0" anchor="t">
+            <a:spAutoFit/>
+          </a:bodyPr>
+          <a:lstStyle/>
+          <a:p>
+            <a:pPr>
+              <a:lnSpc>
+                <a:spcPct val="112000"/>
+              </a:lnSpc>
+              <a:spcAft>
+                <a:spcPts val="300"/>
+              </a:spcAft>
+              <a:defRPr sz="1350" b="0">
                 <a:solidFill>
                   <a:srgbClr val="182B43"/>
                 </a:solidFill>
@@ -21399,8 +21399,8 @@
         </p:nvSpPr>
         <p:spPr>
           <a:xfrm>
-            <a:off x="4096512" y="5012740"/>
-            <a:ext cx="7589520" cy="534009"/>
+            <a:off x="4096512" y="5078577"/>
+            <a:ext cx="7589520" cy="501091"/>
           </a:xfrm>
           <a:prstGeom prst="roundRect">
             <a:avLst>
@@ -21444,7 +21444,7 @@
         </p:nvSpPr>
         <p:spPr>
           <a:xfrm>
-            <a:off x="4233672" y="5122468"/>
+            <a:off x="4233672" y="5188305"/>
             <a:ext cx="594360" cy="256032"/>
           </a:xfrm>
           <a:prstGeom prst="rect">
@@ -21486,7 +21486,7 @@
         </p:nvSpPr>
         <p:spPr>
           <a:xfrm>
-            <a:off x="4937760" y="5085892"/>
+            <a:off x="4937760" y="5151729"/>
             <a:ext cx="6537960" cy="219456"/>
           </a:xfrm>
           <a:prstGeom prst="rect">
@@ -21528,28 +21528,28 @@
         </p:nvSpPr>
         <p:spPr>
           <a:xfrm>
-            <a:off x="4937760" y="5323636"/>
-            <a:ext cx="6537960" cy="232257"/>
-          </a:xfrm>
-          <a:prstGeom prst="rect">
-            <a:avLst/>
-          </a:prstGeom>
-          <a:noFill/>
-        </p:spPr>
-        <p:txBody>
-          <a:bodyPr wrap="square" lIns="0" rIns="0" tIns="0" bIns="0" anchor="t">
-            <a:spAutoFit/>
-          </a:bodyPr>
-          <a:lstStyle/>
-          <a:p>
-            <a:pPr>
-              <a:lnSpc>
-                <a:spcPct val="112000"/>
-              </a:lnSpc>
-              <a:spcAft>
-                <a:spcPts val="300"/>
-              </a:spcAft>
-              <a:defRPr sz="1400" b="0">
+            <a:off x="4937760" y="5352897"/>
+            <a:ext cx="6537960" cy="263347"/>
+          </a:xfrm>
+          <a:prstGeom prst="rect">
+            <a:avLst/>
+          </a:prstGeom>
+          <a:noFill/>
+        </p:spPr>
+        <p:txBody>
+          <a:bodyPr wrap="square" lIns="0" rIns="0" tIns="0" bIns="0" anchor="t">
+            <a:spAutoFit/>
+          </a:bodyPr>
+          <a:lstStyle/>
+          <a:p>
+            <a:pPr>
+              <a:lnSpc>
+                <a:spcPct val="112000"/>
+              </a:lnSpc>
+              <a:spcAft>
+                <a:spcPts val="300"/>
+              </a:spcAft>
+              <a:defRPr sz="1350" b="0">
                 <a:solidFill>
                   <a:srgbClr val="182B43"/>
                 </a:solidFill>
@@ -21570,8 +21570,8 @@
         </p:nvSpPr>
         <p:spPr>
           <a:xfrm>
-            <a:off x="4096512" y="5601614"/>
-            <a:ext cx="7589520" cy="534009"/>
+            <a:off x="4096512" y="5634532"/>
+            <a:ext cx="7589520" cy="501091"/>
           </a:xfrm>
           <a:prstGeom prst="roundRect">
             <a:avLst>
@@ -21615,7 +21615,7 @@
         </p:nvSpPr>
         <p:spPr>
           <a:xfrm>
-            <a:off x="4233672" y="5711342"/>
+            <a:off x="4233672" y="5744260"/>
             <a:ext cx="594360" cy="256032"/>
           </a:xfrm>
           <a:prstGeom prst="rect">
@@ -21657,7 +21657,7 @@
         </p:nvSpPr>
         <p:spPr>
           <a:xfrm>
-            <a:off x="4937760" y="5674766"/>
+            <a:off x="4937760" y="5707684"/>
             <a:ext cx="6537960" cy="219456"/>
           </a:xfrm>
           <a:prstGeom prst="rect">
@@ -21699,28 +21699,28 @@
         </p:nvSpPr>
         <p:spPr>
           <a:xfrm>
-            <a:off x="4937760" y="5912510"/>
-            <a:ext cx="6537960" cy="232257"/>
-          </a:xfrm>
-          <a:prstGeom prst="rect">
-            <a:avLst/>
-          </a:prstGeom>
-          <a:noFill/>
-        </p:spPr>
-        <p:txBody>
-          <a:bodyPr wrap="square" lIns="0" rIns="0" tIns="0" bIns="0" anchor="t">
-            <a:spAutoFit/>
-          </a:bodyPr>
-          <a:lstStyle/>
-          <a:p>
-            <a:pPr>
-              <a:lnSpc>
-                <a:spcPct val="112000"/>
-              </a:lnSpc>
-              <a:spcAft>
-                <a:spcPts val="300"/>
-              </a:spcAft>
-              <a:defRPr sz="1400" b="0">
+            <a:off x="4937760" y="5908852"/>
+            <a:ext cx="6537960" cy="263347"/>
+          </a:xfrm>
+          <a:prstGeom prst="rect">
+            <a:avLst/>
+          </a:prstGeom>
+          <a:noFill/>
+        </p:spPr>
+        <p:txBody>
+          <a:bodyPr wrap="square" lIns="0" rIns="0" tIns="0" bIns="0" anchor="t">
+            <a:spAutoFit/>
+          </a:bodyPr>
+          <a:lstStyle/>
+          <a:p>
+            <a:pPr>
+              <a:lnSpc>
+                <a:spcPct val="112000"/>
+              </a:lnSpc>
+              <a:spcAft>
+                <a:spcPts val="300"/>
+              </a:spcAft>
+              <a:defRPr sz="1350" b="0">
                 <a:solidFill>
                   <a:srgbClr val="182B43"/>
                 </a:solidFill>
